--- a/assets/pptx/catalog-526.pptx
+++ b/assets/pptx/catalog-526.pptx
@@ -3269,7 +3269,7 @@
                 <a:ea typeface="Ebrima"/>
                 <a:cs typeface="Ebrima"/>
               </a:rPr>
-              <a:t>አንተ እኮ ግሩም ነህ ግሩም (x2)</a:t>
+              <a:t>አንተ እኮ ግሩም ነህ ግሩም x2</a:t>
             </a:r>
           </a:p>
         </p:txBody>
@@ -3336,7 +3336,7 @@
                 <a:ea typeface="Ebrima"/>
                 <a:cs typeface="Ebrima"/>
               </a:rPr>
-              <a:t>እግዚአብሔር ግሩም ነህ ግሩም (x2)</a:t>
+              <a:t>እግዚአብሔር ግሩም ነህ ግሩም x2</a:t>
             </a:r>
           </a:p>
         </p:txBody>
@@ -3403,7 +3403,7 @@
                 <a:ea typeface="Ebrima"/>
                 <a:cs typeface="Ebrima"/>
               </a:rPr>
-              <a:t>ግሩም ነህ አንተ ግሩም (x4)</a:t>
+              <a:t>ግሩም ነህ አንተ ግሩም x4</a:t>
             </a:r>
           </a:p>
         </p:txBody>
@@ -3805,7 +3805,7 @@
                 <a:ea typeface="Ebrima"/>
                 <a:cs typeface="Ebrima"/>
               </a:rPr>
-              <a:t>አንገቱን ነቅንቆ ወይ አንተ ይልሃል (2x)</a:t>
+              <a:t>አንገቱን ነቅንቆ ወይ አንተ ይልሃል 2x</a:t>
             </a:r>
           </a:p>
         </p:txBody>
@@ -3939,7 +3939,7 @@
                 <a:ea typeface="Ebrima"/>
                 <a:cs typeface="Ebrima"/>
               </a:rPr>
-              <a:t>አንተ ግን አንተ ግሩም ነህ (2x)</a:t>
+              <a:t>አንተ ግን አንተ ግሩም ነህ 2x</a:t>
             </a:r>
           </a:p>
         </p:txBody>
@@ -4140,7 +4140,7 @@
                 <a:ea typeface="Ebrima"/>
                 <a:cs typeface="Ebrima"/>
               </a:rPr>
-              <a:t>እግዚአብሔር ግሩም ነህ ግሩም ነህ (x2)</a:t>
+              <a:t>እግዚአብሔር ግሩም ነህ ግሩም ነህ x2</a:t>
             </a:r>
           </a:p>
         </p:txBody>
@@ -4274,7 +4274,7 @@
                 <a:ea typeface="Ebrima"/>
                 <a:cs typeface="Ebrima"/>
               </a:rPr>
-              <a:t>አቤት እንዴት ግሩም ነህ (3x)</a:t>
+              <a:t>አቤት እንዴት ግሩም ነህ 3x</a:t>
             </a:r>
           </a:p>
         </p:txBody>
@@ -4408,7 +4408,7 @@
                 <a:ea typeface="Ebrima"/>
                 <a:cs typeface="Ebrima"/>
               </a:rPr>
-              <a:t>አቤት እንዴት ግሩም ነው (2x)</a:t>
+              <a:t>አቤት እንዴት ግሩም ነው 2x</a:t>
             </a:r>
           </a:p>
         </p:txBody>
@@ -4542,7 +4542,7 @@
                 <a:ea typeface="Ebrima"/>
                 <a:cs typeface="Ebrima"/>
               </a:rPr>
-              <a:t>ድንቁስ እንዴት እንዴት ድንቅ ነው (2x)</a:t>
+              <a:t>ድንቁስ እንዴት እንዴት ድንቅ ነው 2x</a:t>
             </a:r>
           </a:p>
         </p:txBody>
@@ -4609,7 +4609,7 @@
                 <a:ea typeface="Ebrima"/>
                 <a:cs typeface="Ebrima"/>
               </a:rPr>
-              <a:t>አንተ ግን አንተ ግሩም ነህ (2x)</a:t>
+              <a:t>አንተ ግን አንተ ግሩም ነህ 2x</a:t>
             </a:r>
           </a:p>
         </p:txBody>
@@ -4676,7 +4676,7 @@
                 <a:ea typeface="Ebrima"/>
                 <a:cs typeface="Ebrima"/>
               </a:rPr>
-              <a:t>ግሩም ነህ አንተ ግሩም (4x)</a:t>
+              <a:t>ግሩም ነህ አንተ ግሩም 4x</a:t>
             </a:r>
           </a:p>
         </p:txBody>
@@ -4743,7 +4743,7 @@
                 <a:ea typeface="Ebrima"/>
                 <a:cs typeface="Ebrima"/>
               </a:rPr>
-              <a:t>ግሩም ነህ አንተ ግሩም (4x)</a:t>
+              <a:t>ግሩም ነህ አንተ ግሩም 4x</a:t>
             </a:r>
           </a:p>
         </p:txBody>
@@ -4810,7 +4810,7 @@
                 <a:ea typeface="Ebrima"/>
                 <a:cs typeface="Ebrima"/>
               </a:rPr>
-              <a:t>ግሩም ነህ ግሩም(4x)</a:t>
+              <a:t>ግሩም ነህ ግሩም4x</a:t>
             </a:r>
           </a:p>
         </p:txBody>
@@ -4944,7 +4944,7 @@
                 <a:ea typeface="Ebrima"/>
                 <a:cs typeface="Ebrima"/>
               </a:rPr>
-              <a:t>አንተ እኮ ግሩም ነህ ግሩም ነህ (x2)</a:t>
+              <a:t>አንተ እኮ ግሩም ነህ ግሩም ነህ x2</a:t>
             </a:r>
           </a:p>
         </p:txBody>
@@ -5011,7 +5011,7 @@
                 <a:ea typeface="Ebrima"/>
                 <a:cs typeface="Ebrima"/>
               </a:rPr>
-              <a:t>ግሩም ነህ አንተ ግሩም (x4)</a:t>
+              <a:t>ግሩም ነህ አንተ ግሩም x4</a:t>
             </a:r>
           </a:p>
         </p:txBody>
@@ -5078,7 +5078,7 @@
                 <a:ea typeface="Ebrima"/>
                 <a:cs typeface="Ebrima"/>
               </a:rPr>
-              <a:t>አንተ(6x)</a:t>
+              <a:t>አንተ6x</a:t>
             </a:r>
           </a:p>
         </p:txBody>
@@ -5145,7 +5145,7 @@
                 <a:ea typeface="Ebrima"/>
                 <a:cs typeface="Ebrima"/>
               </a:rPr>
-              <a:t>አንተ እኮ ግሩም ነህ ግሩም (x2)</a:t>
+              <a:t>አንተ እኮ ግሩም ነህ ግሩም x2</a:t>
             </a:r>
           </a:p>
         </p:txBody>
